--- a/신뢰구간 임용고시 2015.pptx
+++ b/신뢰구간 임용고시 2015.pptx
@@ -254,7 +254,7 @@
           <a:p>
             <a:fld id="{5B3AD1D6-AE87-C841-B3FD-7C9F7FCAE5AE}" type="datetimeFigureOut">
               <a:rPr lang="en-US" smtClean="0"/>
-              <a:t>12/15/19</a:t>
+              <a:t>12/17/19</a:t>
             </a:fld>
             <a:endParaRPr lang="en-US"/>
           </a:p>
@@ -424,7 +424,7 @@
           <a:p>
             <a:fld id="{5B3AD1D6-AE87-C841-B3FD-7C9F7FCAE5AE}" type="datetimeFigureOut">
               <a:rPr lang="en-US" smtClean="0"/>
-              <a:t>12/15/19</a:t>
+              <a:t>12/17/19</a:t>
             </a:fld>
             <a:endParaRPr lang="en-US"/>
           </a:p>
@@ -604,7 +604,7 @@
           <a:p>
             <a:fld id="{5B3AD1D6-AE87-C841-B3FD-7C9F7FCAE5AE}" type="datetimeFigureOut">
               <a:rPr lang="en-US" smtClean="0"/>
-              <a:t>12/15/19</a:t>
+              <a:t>12/17/19</a:t>
             </a:fld>
             <a:endParaRPr lang="en-US"/>
           </a:p>
@@ -774,7 +774,7 @@
           <a:p>
             <a:fld id="{5B3AD1D6-AE87-C841-B3FD-7C9F7FCAE5AE}" type="datetimeFigureOut">
               <a:rPr lang="en-US" smtClean="0"/>
-              <a:t>12/15/19</a:t>
+              <a:t>12/17/19</a:t>
             </a:fld>
             <a:endParaRPr lang="en-US"/>
           </a:p>
@@ -1020,7 +1020,7 @@
           <a:p>
             <a:fld id="{5B3AD1D6-AE87-C841-B3FD-7C9F7FCAE5AE}" type="datetimeFigureOut">
               <a:rPr lang="en-US" smtClean="0"/>
-              <a:t>12/15/19</a:t>
+              <a:t>12/17/19</a:t>
             </a:fld>
             <a:endParaRPr lang="en-US"/>
           </a:p>
@@ -1252,7 +1252,7 @@
           <a:p>
             <a:fld id="{5B3AD1D6-AE87-C841-B3FD-7C9F7FCAE5AE}" type="datetimeFigureOut">
               <a:rPr lang="en-US" smtClean="0"/>
-              <a:t>12/15/19</a:t>
+              <a:t>12/17/19</a:t>
             </a:fld>
             <a:endParaRPr lang="en-US"/>
           </a:p>
@@ -1619,7 +1619,7 @@
           <a:p>
             <a:fld id="{5B3AD1D6-AE87-C841-B3FD-7C9F7FCAE5AE}" type="datetimeFigureOut">
               <a:rPr lang="en-US" smtClean="0"/>
-              <a:t>12/15/19</a:t>
+              <a:t>12/17/19</a:t>
             </a:fld>
             <a:endParaRPr lang="en-US"/>
           </a:p>
@@ -1737,7 +1737,7 @@
           <a:p>
             <a:fld id="{5B3AD1D6-AE87-C841-B3FD-7C9F7FCAE5AE}" type="datetimeFigureOut">
               <a:rPr lang="en-US" smtClean="0"/>
-              <a:t>12/15/19</a:t>
+              <a:t>12/17/19</a:t>
             </a:fld>
             <a:endParaRPr lang="en-US"/>
           </a:p>
@@ -1832,7 +1832,7 @@
           <a:p>
             <a:fld id="{5B3AD1D6-AE87-C841-B3FD-7C9F7FCAE5AE}" type="datetimeFigureOut">
               <a:rPr lang="en-US" smtClean="0"/>
-              <a:t>12/15/19</a:t>
+              <a:t>12/17/19</a:t>
             </a:fld>
             <a:endParaRPr lang="en-US"/>
           </a:p>
@@ -2109,7 +2109,7 @@
           <a:p>
             <a:fld id="{5B3AD1D6-AE87-C841-B3FD-7C9F7FCAE5AE}" type="datetimeFigureOut">
               <a:rPr lang="en-US" smtClean="0"/>
-              <a:t>12/15/19</a:t>
+              <a:t>12/17/19</a:t>
             </a:fld>
             <a:endParaRPr lang="en-US"/>
           </a:p>
@@ -2362,7 +2362,7 @@
           <a:p>
             <a:fld id="{5B3AD1D6-AE87-C841-B3FD-7C9F7FCAE5AE}" type="datetimeFigureOut">
               <a:rPr lang="en-US" smtClean="0"/>
-              <a:t>12/15/19</a:t>
+              <a:t>12/17/19</a:t>
             </a:fld>
             <a:endParaRPr lang="en-US"/>
           </a:p>
@@ -2575,7 +2575,7 @@
           <a:p>
             <a:fld id="{5B3AD1D6-AE87-C841-B3FD-7C9F7FCAE5AE}" type="datetimeFigureOut">
               <a:rPr lang="en-US" smtClean="0"/>
-              <a:t>12/15/19</a:t>
+              <a:t>12/17/19</a:t>
             </a:fld>
             <a:endParaRPr lang="en-US"/>
           </a:p>
@@ -3198,7 +3198,7 @@
               </a:rPr>
             </a:br>
             <a:r>
-              <a:rPr lang="en-US" sz="6700" dirty="0" smtClean="0">
+              <a:rPr lang="en-US" sz="6700" smtClean="0">
                 <a:latin typeface="Arial Black" charset="0"/>
                 <a:ea typeface="Arial Black" charset="0"/>
                 <a:cs typeface="Arial Black" charset="0"/>
@@ -3206,12 +3206,20 @@
               <a:t>Confidence Interval</a:t>
             </a:r>
             <a:br>
-              <a:rPr lang="en-US" sz="6700" dirty="0" smtClean="0">
+              <a:rPr lang="en-US" sz="6700" smtClean="0">
                 <a:latin typeface="Arial Black" charset="0"/>
                 <a:ea typeface="Arial Black" charset="0"/>
                 <a:cs typeface="Arial Black" charset="0"/>
               </a:rPr>
             </a:br>
+            <a:r>
+              <a:rPr lang="en-US" sz="6700" smtClean="0">
+                <a:latin typeface="Arial Black" charset="0"/>
+                <a:ea typeface="Arial Black" charset="0"/>
+                <a:cs typeface="Arial Black" charset="0"/>
+              </a:rPr>
+              <a:t>2015</a:t>
+            </a:r>
             <a:r>
               <a:rPr lang="en-US" sz="6700" dirty="0" smtClean="0">
                 <a:latin typeface="Arial Black" charset="0"/>
@@ -3271,6 +3279,13 @@
   <p:clrMapOvr>
     <a:masterClrMapping/>
   </p:clrMapOvr>
+  <p:timing>
+    <p:tnLst>
+      <p:par>
+        <p:cTn id="1" dur="indefinite" restart="never" nodeType="tmRoot"/>
+      </p:par>
+    </p:tnLst>
+  </p:timing>
 </p:sld>
 </file>
 
@@ -3451,6 +3466,13 @@
   <p:clrMapOvr>
     <a:masterClrMapping/>
   </p:clrMapOvr>
+  <p:timing>
+    <p:tnLst>
+      <p:par>
+        <p:cTn id="1" dur="indefinite" restart="never" nodeType="tmRoot"/>
+      </p:par>
+    </p:tnLst>
+  </p:timing>
 </p:sld>
 </file>
 
@@ -3631,6 +3653,13 @@
   <p:clrMapOvr>
     <a:masterClrMapping/>
   </p:clrMapOvr>
+  <p:timing>
+    <p:tnLst>
+      <p:par>
+        <p:cTn id="1" dur="indefinite" restart="never" nodeType="tmRoot"/>
+      </p:par>
+    </p:tnLst>
+  </p:timing>
 </p:sld>
 </file>
 
@@ -3781,6 +3810,13 @@
   <p:clrMapOvr>
     <a:masterClrMapping/>
   </p:clrMapOvr>
+  <p:timing>
+    <p:tnLst>
+      <p:par>
+        <p:cTn id="1" dur="indefinite" restart="never" nodeType="tmRoot"/>
+      </p:par>
+    </p:tnLst>
+  </p:timing>
 </p:sld>
 </file>
 
@@ -4036,6 +4072,13 @@
   <p:clrMapOvr>
     <a:masterClrMapping/>
   </p:clrMapOvr>
+  <p:timing>
+    <p:tnLst>
+      <p:par>
+        <p:cTn id="1" dur="indefinite" restart="never" nodeType="tmRoot"/>
+      </p:par>
+    </p:tnLst>
+  </p:timing>
 </p:sld>
 </file>
 
@@ -4186,6 +4229,13 @@
   <p:clrMapOvr>
     <a:masterClrMapping/>
   </p:clrMapOvr>
+  <p:timing>
+    <p:tnLst>
+      <p:par>
+        <p:cTn id="1" dur="indefinite" restart="never" nodeType="tmRoot"/>
+      </p:par>
+    </p:tnLst>
+  </p:timing>
 </p:sld>
 </file>
 
@@ -4336,6 +4386,13 @@
   <p:clrMapOvr>
     <a:masterClrMapping/>
   </p:clrMapOvr>
+  <p:timing>
+    <p:tnLst>
+      <p:par>
+        <p:cTn id="1" dur="indefinite" restart="never" nodeType="tmRoot"/>
+      </p:par>
+    </p:tnLst>
+  </p:timing>
 </p:sld>
 </file>
 
@@ -4486,6 +4543,13 @@
   <p:clrMapOvr>
     <a:masterClrMapping/>
   </p:clrMapOvr>
+  <p:timing>
+    <p:tnLst>
+      <p:par>
+        <p:cTn id="1" dur="indefinite" restart="never" nodeType="tmRoot"/>
+      </p:par>
+    </p:tnLst>
+  </p:timing>
 </p:sld>
 </file>
 
@@ -4636,6 +4700,13 @@
   <p:clrMapOvr>
     <a:masterClrMapping/>
   </p:clrMapOvr>
+  <p:timing>
+    <p:tnLst>
+      <p:par>
+        <p:cTn id="1" dur="indefinite" restart="never" nodeType="tmRoot"/>
+      </p:par>
+    </p:tnLst>
+  </p:timing>
 </p:sld>
 </file>
 
@@ -4756,6 +4827,13 @@
   <p:clrMapOvr>
     <a:masterClrMapping/>
   </p:clrMapOvr>
+  <p:timing>
+    <p:tnLst>
+      <p:par>
+        <p:cTn id="1" dur="indefinite" restart="never" nodeType="tmRoot"/>
+      </p:par>
+    </p:tnLst>
+  </p:timing>
 </p:sld>
 </file>
 
@@ -4936,6 +5014,13 @@
   <p:clrMapOvr>
     <a:masterClrMapping/>
   </p:clrMapOvr>
+  <p:timing>
+    <p:tnLst>
+      <p:par>
+        <p:cTn id="1" dur="indefinite" restart="never" nodeType="tmRoot"/>
+      </p:par>
+    </p:tnLst>
+  </p:timing>
 </p:sld>
 </file>
 
